--- a/RA5 - Legislacio i normativa/AA1 - Proteccio de dades/RA5_AA1_Proteccio_dades.pptx
+++ b/RA5 - Legislacio i normativa/AA1 - Proteccio de dades/RA5_AA1_Proteccio_dades.pptx
@@ -2229,6 +2229,10 @@
           </a:solidFill>
           <a:ln/>
         </p:spPr>
+        <p:txBody>
+          <a:bodyPr/>
+          <a:p/>
+        </p:txBody>
       </p:sp>
       <p:sp>
         <p:nvSpPr>
@@ -2249,6 +2253,10 @@
           </a:solidFill>
           <a:ln/>
         </p:spPr>
+        <p:txBody>
+          <a:bodyPr/>
+          <a:p/>
+        </p:txBody>
       </p:sp>
       <p:sp>
         <p:nvSpPr>
@@ -3531,6 +3539,10 @@
           </a:solidFill>
           <a:ln/>
         </p:spPr>
+        <p:txBody>
+          <a:bodyPr/>
+          <a:p/>
+        </p:txBody>
       </p:sp>
       <p:pic>
         <p:nvPicPr>
@@ -3874,6 +3886,10 @@
             </a:outerShdw>
           </a:effectLst>
         </p:spPr>
+        <p:txBody>
+          <a:bodyPr/>
+          <a:p/>
+        </p:txBody>
       </p:sp>
       <p:sp>
         <p:nvSpPr>
@@ -3894,6 +3910,10 @@
           </a:solidFill>
           <a:ln/>
         </p:spPr>
+        <p:txBody>
+          <a:bodyPr/>
+          <a:p/>
+        </p:txBody>
       </p:sp>
       <p:pic>
         <p:nvPicPr>
@@ -4033,6 +4053,10 @@
             </a:outerShdw>
           </a:effectLst>
         </p:spPr>
+        <p:txBody>
+          <a:bodyPr/>
+          <a:p/>
+        </p:txBody>
       </p:sp>
       <p:sp>
         <p:nvSpPr>
@@ -4053,6 +4077,10 @@
           </a:solidFill>
           <a:ln/>
         </p:spPr>
+        <p:txBody>
+          <a:bodyPr/>
+          <a:p/>
+        </p:txBody>
       </p:sp>
       <p:pic>
         <p:nvPicPr>
@@ -4192,6 +4220,10 @@
             </a:outerShdw>
           </a:effectLst>
         </p:spPr>
+        <p:txBody>
+          <a:bodyPr/>
+          <a:p/>
+        </p:txBody>
       </p:sp>
       <p:sp>
         <p:nvSpPr>
@@ -4212,6 +4244,10 @@
           </a:solidFill>
           <a:ln/>
         </p:spPr>
+        <p:txBody>
+          <a:bodyPr/>
+          <a:p/>
+        </p:txBody>
       </p:sp>
       <p:pic>
         <p:nvPicPr>
@@ -4743,6 +4779,10 @@
             </a:outerShdw>
           </a:effectLst>
         </p:spPr>
+        <p:txBody>
+          <a:bodyPr/>
+          <a:p/>
+        </p:txBody>
       </p:sp>
       <p:sp>
         <p:nvSpPr>
@@ -4763,6 +4803,10 @@
           </a:solidFill>
           <a:ln/>
         </p:spPr>
+        <p:txBody>
+          <a:bodyPr/>
+          <a:p/>
+        </p:txBody>
       </p:sp>
       <p:pic>
         <p:nvPicPr>
@@ -4902,6 +4946,10 @@
             </a:outerShdw>
           </a:effectLst>
         </p:spPr>
+        <p:txBody>
+          <a:bodyPr/>
+          <a:p/>
+        </p:txBody>
       </p:sp>
       <p:sp>
         <p:nvSpPr>
@@ -4922,6 +4970,10 @@
           </a:solidFill>
           <a:ln/>
         </p:spPr>
+        <p:txBody>
+          <a:bodyPr/>
+          <a:p/>
+        </p:txBody>
       </p:sp>
       <p:pic>
         <p:nvPicPr>
@@ -5061,6 +5113,10 @@
             </a:outerShdw>
           </a:effectLst>
         </p:spPr>
+        <p:txBody>
+          <a:bodyPr/>
+          <a:p/>
+        </p:txBody>
       </p:sp>
       <p:sp>
         <p:nvSpPr>
@@ -5081,6 +5137,10 @@
           </a:solidFill>
           <a:ln/>
         </p:spPr>
+        <p:txBody>
+          <a:bodyPr/>
+          <a:p/>
+        </p:txBody>
       </p:sp>
       <p:pic>
         <p:nvPicPr>
@@ -5899,7 +5959,7 @@
                 <a:ea typeface="Calibri" pitchFamily="34" charset="-122"/>
                 <a:cs typeface="Calibri" pitchFamily="34" charset="-120"/>
               </a:rPr>
-              <a:t>Llicència Creative Commons BY-NC-SA · Institut Obert de Catalunya, 2011 (materials adaptats i ampliats)</a:t>
+              <a:t>Llicència CC BY-SA 4.0 · Adaptat de "Materials" (SMX-0226SI), Carlos Alonso Martínez, Escola Pia de Mataró</a:t>
             </a:r>
             <a:endParaRPr lang="en-US" sz="1050" dirty="0"/>
           </a:p>
@@ -6126,6 +6186,10 @@
             </a:outerShdw>
           </a:effectLst>
         </p:spPr>
+        <p:txBody>
+          <a:bodyPr/>
+          <a:p/>
+        </p:txBody>
       </p:sp>
       <p:sp>
         <p:nvSpPr>
@@ -6146,6 +6210,10 @@
           </a:solidFill>
           <a:ln/>
         </p:spPr>
+        <p:txBody>
+          <a:bodyPr/>
+          <a:p/>
+        </p:txBody>
       </p:sp>
       <p:pic>
         <p:nvPicPr>
@@ -6285,6 +6353,10 @@
             </a:outerShdw>
           </a:effectLst>
         </p:spPr>
+        <p:txBody>
+          <a:bodyPr/>
+          <a:p/>
+        </p:txBody>
       </p:sp>
       <p:sp>
         <p:nvSpPr>
@@ -6305,6 +6377,10 @@
           </a:solidFill>
           <a:ln/>
         </p:spPr>
+        <p:txBody>
+          <a:bodyPr/>
+          <a:p/>
+        </p:txBody>
       </p:sp>
       <p:pic>
         <p:nvPicPr>
@@ -6444,6 +6520,10 @@
             </a:outerShdw>
           </a:effectLst>
         </p:spPr>
+        <p:txBody>
+          <a:bodyPr/>
+          <a:p/>
+        </p:txBody>
       </p:sp>
       <p:sp>
         <p:nvSpPr>
@@ -6464,6 +6544,10 @@
           </a:solidFill>
           <a:ln/>
         </p:spPr>
+        <p:txBody>
+          <a:bodyPr/>
+          <a:p/>
+        </p:txBody>
       </p:sp>
       <p:pic>
         <p:nvPicPr>
@@ -7087,6 +7171,10 @@
             </a:outerShdw>
           </a:effectLst>
         </p:spPr>
+        <p:txBody>
+          <a:bodyPr/>
+          <a:p/>
+        </p:txBody>
       </p:sp>
       <p:sp>
         <p:nvSpPr>
@@ -7107,6 +7195,10 @@
           </a:solidFill>
           <a:ln/>
         </p:spPr>
+        <p:txBody>
+          <a:bodyPr/>
+          <a:p/>
+        </p:txBody>
       </p:sp>
       <p:pic>
         <p:nvPicPr>
@@ -7246,6 +7338,10 @@
             </a:outerShdw>
           </a:effectLst>
         </p:spPr>
+        <p:txBody>
+          <a:bodyPr/>
+          <a:p/>
+        </p:txBody>
       </p:sp>
       <p:sp>
         <p:nvSpPr>
@@ -7266,6 +7362,10 @@
           </a:solidFill>
           <a:ln/>
         </p:spPr>
+        <p:txBody>
+          <a:bodyPr/>
+          <a:p/>
+        </p:txBody>
       </p:sp>
       <p:pic>
         <p:nvPicPr>
@@ -7393,6 +7493,10 @@
           </a:solidFill>
           <a:ln/>
         </p:spPr>
+        <p:txBody>
+          <a:bodyPr/>
+          <a:p/>
+        </p:txBody>
       </p:sp>
       <p:pic>
         <p:nvPicPr>
@@ -7642,6 +7746,10 @@
             </a:outerShdw>
           </a:effectLst>
         </p:spPr>
+        <p:txBody>
+          <a:bodyPr/>
+          <a:p/>
+        </p:txBody>
       </p:sp>
       <p:sp>
         <p:nvSpPr>
@@ -7662,6 +7770,10 @@
           </a:solidFill>
           <a:ln/>
         </p:spPr>
+        <p:txBody>
+          <a:bodyPr/>
+          <a:p/>
+        </p:txBody>
       </p:sp>
       <p:pic>
         <p:nvPicPr>
@@ -7801,6 +7913,10 @@
             </a:outerShdw>
           </a:effectLst>
         </p:spPr>
+        <p:txBody>
+          <a:bodyPr/>
+          <a:p/>
+        </p:txBody>
       </p:sp>
       <p:sp>
         <p:nvSpPr>
@@ -7821,6 +7937,10 @@
           </a:solidFill>
           <a:ln/>
         </p:spPr>
+        <p:txBody>
+          <a:bodyPr/>
+          <a:p/>
+        </p:txBody>
       </p:sp>
       <p:pic>
         <p:nvPicPr>
@@ -8167,6 +8287,10 @@
           </a:solidFill>
           <a:ln/>
         </p:spPr>
+        <p:txBody>
+          <a:bodyPr/>
+          <a:p/>
+        </p:txBody>
       </p:sp>
       <p:pic>
         <p:nvPicPr>
@@ -8486,6 +8610,10 @@
             </a:outerShdw>
           </a:effectLst>
         </p:spPr>
+        <p:txBody>
+          <a:bodyPr/>
+          <a:p/>
+        </p:txBody>
       </p:sp>
       <p:sp>
         <p:nvSpPr>
@@ -8506,6 +8634,10 @@
           </a:solidFill>
           <a:ln/>
         </p:spPr>
+        <p:txBody>
+          <a:bodyPr/>
+          <a:p/>
+        </p:txBody>
       </p:sp>
       <p:pic>
         <p:nvPicPr>
@@ -8645,6 +8777,10 @@
             </a:outerShdw>
           </a:effectLst>
         </p:spPr>
+        <p:txBody>
+          <a:bodyPr/>
+          <a:p/>
+        </p:txBody>
       </p:sp>
       <p:sp>
         <p:nvSpPr>
@@ -8665,6 +8801,10 @@
           </a:solidFill>
           <a:ln/>
         </p:spPr>
+        <p:txBody>
+          <a:bodyPr/>
+          <a:p/>
+        </p:txBody>
       </p:sp>
       <p:pic>
         <p:nvPicPr>
